--- a/clever_investor_platform_proposal.pptx
+++ b/clever_investor_platform_proposal.pptx
@@ -7242,7 +7242,7 @@
                 <a:ea typeface="Calibri" pitchFamily="34" charset="-122"/>
                 <a:cs typeface="Calibri" pitchFamily="34" charset="-120"/>
               </a:rPr>
-              <a:t>The scrappy POC investor-matching team</a:t>
+              <a:t>The early investor-matching work</a:t>
             </a:r>
             <a:endParaRPr lang="en-US" sz="1100" dirty="0"/>
           </a:p>
@@ -7475,7 +7475,7 @@
                 <a:ea typeface="Calibri" pitchFamily="34" charset="-122"/>
                 <a:cs typeface="Calibri" pitchFamily="34" charset="-120"/>
               </a:rPr>
-              <a:t>Does the structured intake + Loveable routing proposal fit the Offers team's actual capacity? What am I missing about current tribal knowledge dependencies?</a:t>
+              <a:t>Does the structured intake + Loveable routing proposal fit the Offers team's actual capacity? What am I missing about current dependencies?</a:t>
             </a:r>
             <a:endParaRPr lang="en-US" sz="950" dirty="0"/>
           </a:p>
@@ -7630,7 +7630,7 @@
                 <a:ea typeface="Calibri" pitchFamily="34" charset="-122"/>
                 <a:cs typeface="Calibri" pitchFamily="34" charset="-120"/>
               </a:rPr>
-              <a:t>ANVIL capacity + the Phase 2 gate</a:t>
+              <a:t>ANVIL capacity and the Phase 2 gate</a:t>
             </a:r>
             <a:endParaRPr lang="en-US" sz="1100" dirty="0"/>
           </a:p>
@@ -7669,7 +7669,7 @@
                 <a:ea typeface="Calibri" pitchFamily="34" charset="-122"/>
                 <a:cs typeface="Calibri" pitchFamily="34" charset="-120"/>
               </a:rPr>
-              <a:t>Is ANVIL available for Phase 2 buy-box scoring work, or does that need to be an early engineering hire? This changes how I'd sequence the pod build.</a:t>
+              <a:t>Is ANVIL available for Phase 2 buy-box scoring, or does that need to be an early engineering hire? This changes how I'd sequence the pod build.</a:t>
             </a:r>
             <a:endParaRPr lang="en-US" sz="950" dirty="0"/>
           </a:p>
@@ -7824,7 +7824,7 @@
                 <a:ea typeface="Calibri" pitchFamily="34" charset="-122"/>
                 <a:cs typeface="Calibri" pitchFamily="34" charset="-120"/>
               </a:rPr>
-              <a:t>New pod reporting structure</a:t>
+              <a:t>New pod sequencing</a:t>
             </a:r>
             <a:endParaRPr lang="en-US" sz="1100" dirty="0"/>
           </a:p>
@@ -7863,7 +7863,7 @@
                 <a:ea typeface="Calibri" pitchFamily="34" charset="-122"/>
                 <a:cs typeface="Calibri" pitchFamily="34" charset="-120"/>
               </a:rPr>
-              <a:t>The pod's mandate spans Offers + the cross-product account layer. Does it report to Ben (Growth/Offers today), directly to the CPO, or is there a better structure given how Clever is organized?</a:t>
+              <a:t>Does this start under Ben's team for Phase 1 and graduate at Phase 2, or does it need dedicated ownership from Month 1?</a:t>
             </a:r>
             <a:endParaRPr lang="en-US" sz="950" dirty="0"/>
           </a:p>
@@ -8018,7 +8018,7 @@
                 <a:ea typeface="Calibri" pitchFamily="34" charset="-122"/>
                 <a:cs typeface="Calibri" pitchFamily="34" charset="-120"/>
               </a:rPr>
-              <a:t>What's been tried and abandoned</a:t>
+              <a:t>What's been tried and didn't work</a:t>
             </a:r>
             <a:endParaRPr lang="en-US" sz="1100" dirty="0"/>
           </a:p>
@@ -8057,7 +8057,7 @@
                 <a:ea typeface="Calibri" pitchFamily="34" charset="-122"/>
                 <a:cs typeface="Calibri" pitchFamily="34" charset="-120"/>
               </a:rPr>
-              <a:t>Luke mentioned empirical testing. What didn't work on Offers? That signal is as valuable as what did.</a:t>
+              <a:t>What has Clever already tested on Offers that didn't land? That signal is as valuable as what did.</a:t>
             </a:r>
             <a:endParaRPr lang="en-US" sz="950" dirty="0"/>
           </a:p>
@@ -8212,7 +8212,7 @@
                 <a:ea typeface="Calibri" pitchFamily="34" charset="-122"/>
                 <a:cs typeface="Calibri" pitchFamily="34" charset="-120"/>
               </a:rPr>
-              <a:t>Reactions + open curveballs</a:t>
+              <a:t>Reactions and open curveballs</a:t>
             </a:r>
             <a:endParaRPr lang="en-US" sz="1100" dirty="0"/>
           </a:p>
@@ -9716,7 +9716,7 @@
                 <a:ea typeface="Calibri" pitchFamily="34" charset="-122"/>
                 <a:cs typeface="Calibri" pitchFamily="34" charset="-120"/>
               </a:rPr>
-              <a:t>No formal market research exists — hypothesis is grounded in empirical testing</a:t>
+              <a:t>No formal market research — the thesis is grounded in Clever's first-hand experience with sellers, investors, and agents</a:t>
             </a:r>
             <a:endParaRPr lang="en-US" sz="1050" dirty="0"/>
           </a:p>
@@ -10045,7 +10045,7 @@
                 <a:ea typeface="Calibri" pitchFamily="34" charset="-122"/>
                 <a:cs typeface="Calibri" pitchFamily="34" charset="-120"/>
               </a:rPr>
-              <a:t>Exact CVR from submit → investor offer accepted (current baseline)</a:t>
+              <a:t>Conversion rate from submit → investor offer accepted (current baseline)</a:t>
             </a:r>
             <a:endParaRPr lang="en-US" sz="1050" dirty="0"/>
           </a:p>
@@ -10098,7 +10098,7 @@
                 <a:ea typeface="Calibri" pitchFamily="34" charset="-122"/>
                 <a:cs typeface="Calibri" pitchFamily="34" charset="-120"/>
               </a:rPr>
-              <a:t>Which pod owns the scrappy investor-matching POC today</a:t>
+              <a:t>Who owns the early investor-matching work and what's been built</a:t>
             </a:r>
             <a:endParaRPr lang="en-US" sz="1050" dirty="0"/>
           </a:p>
